--- a/临时文件/Di_Poster_ver5.pptx
+++ b/临时文件/Di_Poster_ver5.pptx
@@ -4652,7 +4652,7 @@
           <a:p>
             <a:r>
               <a:rPr lang="en-US" altLang="zh-CN" sz="2200"/>
-              <a:t>The three grasping trials follow similar trajectories, suggesting a consistent relationship among these three variables. We use the regression model to learn this relationship</a:t>
+              <a:t>The three grasping trials follow similar trajectories, suggesting a consistent relationship among these three variables. We use the regression model to learn this relationship.</a:t>
             </a:r>
             <a:endParaRPr lang="en-US" altLang="zh-CN" sz="2200"/>
           </a:p>
